--- a/03_loss_functions/excel_loss_functions_slides.pptx
+++ b/03_loss_functions/excel_loss_functions_slides.pptx
@@ -3278,16 +3278,8 @@
           </a:bodyPr>
           <a:lstStyle/>
           <a:p>
-            <a:pPr algn="l">
-              <a:defRPr sz="1500" b="1">
-                <a:solidFill>
-                  <a:srgbClr val="475569"/>
-                </a:solidFill>
-                <a:latin typeface="Yu Gothic"/>
-              </a:defRPr>
-            </a:pPr>
-            <a:r>
-              <a:t>予測と正解のズレがLossになる流れを見る</a:t>
+            <a:r>
+              <a:t>正解クラスの確率がLossになる流れを見る</a:t>
             </a:r>
           </a:p>
         </p:txBody>
@@ -3568,16 +3560,8 @@
           <a:bodyPr rtlCol="0" anchor="ctr" wrap="square" bIns="36576"/>
           <a:lstStyle/>
           <a:p>
-            <a:pPr algn="ctr">
-              <a:defRPr sz="1300" b="1">
-                <a:solidFill>
-                  <a:srgbClr val="2F6690"/>
-                </a:solidFill>
-                <a:latin typeface="Yu Gothic"/>
-              </a:defRPr>
-            </a:pPr>
-            <a:r>
-              <a:t>予測</a:t>
+            <a:r>
+              <a:t>予測確率</a:t>
             </a:r>
           </a:p>
         </p:txBody>
@@ -3623,16 +3607,8 @@
           <a:bodyPr rtlCol="0" anchor="ctr" wrap="square" bIns="36576"/>
           <a:lstStyle/>
           <a:p>
-            <a:pPr algn="ctr">
-              <a:defRPr sz="1300" b="1">
-                <a:solidFill>
-                  <a:srgbClr val="C77D20"/>
-                </a:solidFill>
-                <a:latin typeface="Yu Gothic"/>
-              </a:defRPr>
-            </a:pPr>
-            <a:r>
-              <a:t>正解</a:t>
+            <a:r>
+              <a:t>正解クラス</a:t>
             </a:r>
           </a:p>
         </p:txBody>
@@ -3678,16 +3654,8 @@
           <a:bodyPr rtlCol="0" anchor="ctr" wrap="square" bIns="36576"/>
           <a:lstStyle/>
           <a:p>
-            <a:pPr algn="ctr">
-              <a:defRPr sz="1300" b="1">
-                <a:solidFill>
-                  <a:srgbClr val="C77D20"/>
-                </a:solidFill>
-                <a:latin typeface="Yu Gothic"/>
-              </a:defRPr>
-            </a:pPr>
-            <a:r>
-              <a:t>ズレ</a:t>
+            <a:r>
+              <a:t>-log</a:t>
             </a:r>
           </a:p>
         </p:txBody>
@@ -4527,16 +4495,8 @@
           </a:bodyPr>
           <a:lstStyle/>
           <a:p>
-            <a:pPr algn="l">
-              <a:defRPr sz="2500" b="1">
-                <a:solidFill>
-                  <a:srgbClr val="24324B"/>
-                </a:solidFill>
-                <a:latin typeface="Yu Gothic"/>
-              </a:defRPr>
-            </a:pPr>
-            <a:r>
-              <a:t>display_modeで表示する表を切り替える</a:t>
+            <a:r>
+              <a:t>display_modeでLossの表を切り替える</a:t>
             </a:r>
           </a:p>
         </p:txBody>
@@ -4905,24 +4865,16 @@
           <a:bodyPr rtlCol="0" anchor="ctr" wrap="square" bIns="36576"/>
           <a:lstStyle/>
           <a:p>
-            <a:pPr algn="ctr">
-              <a:defRPr sz="1700" b="1">
-                <a:solidFill>
-                  <a:srgbClr val="276749"/>
-                </a:solidFill>
-                <a:latin typeface="Yu Gothic"/>
-              </a:defRPr>
-            </a:pPr>
-            <a:r>
-              <a:t>まずは</a:t>
+            <a:r>
+              <a:t>class_ce_dfで</a:t>
             </a:r>
             <a:br/>
             <a:r>
-              <a:t>基本の表</a:t>
+              <a:t>正解確率と</a:t>
             </a:r>
             <a:br/>
             <a:r>
-              <a:t>から読む</a:t>
+              <a:t>Lossを読む</a:t>
             </a:r>
           </a:p>
         </p:txBody>
@@ -5047,16 +4999,8 @@
           </a:bodyPr>
           <a:lstStyle/>
           <a:p>
-            <a:pPr algn="l">
-              <a:defRPr sz="2500" b="1">
-                <a:solidFill>
-                  <a:srgbClr val="24324B"/>
-                </a:solidFill>
-                <a:latin typeface="Yu Gothic"/>
-              </a:defRPr>
-            </a:pPr>
-            <a:r>
-              <a:t>返却表の列を読む</a:t>
+            <a:r>
+              <a:t>class_ce_df の列を読む</a:t>
             </a:r>
           </a:p>
         </p:txBody>
@@ -5378,24 +5322,16 @@
           <a:bodyPr rtlCol="0" anchor="ctr" wrap="square" bIns="36576"/>
           <a:lstStyle/>
           <a:p>
-            <a:pPr algn="ctr">
-              <a:defRPr sz="1700" b="1">
-                <a:solidFill>
-                  <a:srgbClr val="2F6690"/>
-                </a:solidFill>
-                <a:latin typeface="Yu Gothic"/>
-              </a:defRPr>
-            </a:pPr>
-            <a:r>
-              <a:t>列名を</a:t>
+            <a:r>
+              <a:t>target_probability が</a:t>
             </a:r>
             <a:br/>
             <a:r>
-              <a:t>計算の役割に</a:t>
+              <a:t>低いほど</a:t>
             </a:r>
             <a:br/>
             <a:r>
-              <a:t>対応づける</a:t>
+              <a:t>cross_entropy は大きい</a:t>
             </a:r>
           </a:p>
         </p:txBody>
@@ -5520,16 +5456,8 @@
           </a:bodyPr>
           <a:lstStyle/>
           <a:p>
-            <a:pPr algn="l">
-              <a:defRPr sz="2500" b="1">
-                <a:solidFill>
-                  <a:srgbClr val="24324B"/>
-                </a:solidFill>
-                <a:latin typeface="Yu Gothic"/>
-              </a:defRPr>
-            </a:pPr>
-            <a:r>
-              <a:t>設定を変えた時の差を見る</a:t>
+            <a:r>
+              <a:t>正解確率を変えた時の差を見る</a:t>
             </a:r>
           </a:p>
         </p:txBody>
@@ -5851,24 +5779,16 @@
           <a:bodyPr rtlCol="0" anchor="ctr" wrap="square" bIns="36576"/>
           <a:lstStyle/>
           <a:p>
-            <a:pPr algn="ctr">
-              <a:defRPr sz="1700" b="1">
-                <a:solidFill>
-                  <a:srgbClr val="276749"/>
-                </a:solidFill>
-                <a:latin typeface="Yu Gothic"/>
-              </a:defRPr>
-            </a:pPr>
-            <a:r>
-              <a:t>設定を変えたら</a:t>
+            <a:r>
+              <a:t>正解クラスの確率を</a:t>
             </a:r>
             <a:br/>
             <a:r>
-              <a:t>どの列が動くかを</a:t>
+              <a:t>変えたら</a:t>
             </a:r>
             <a:br/>
             <a:r>
-              <a:t>見る</a:t>
+              <a:t>Lossの差を見る</a:t>
             </a:r>
           </a:p>
         </p:txBody>
@@ -6048,16 +5968,8 @@
           <a:bodyPr rtlCol="0" anchor="ctr" wrap="square" bIns="36576"/>
           <a:lstStyle/>
           <a:p>
-            <a:pPr algn="ctr">
-              <a:defRPr sz="1300" b="1">
-                <a:solidFill>
-                  <a:srgbClr val="2F6690"/>
-                </a:solidFill>
-                <a:latin typeface="Yu Gothic"/>
-              </a:defRPr>
-            </a:pPr>
-            <a:r>
-              <a:t>予測</a:t>
+            <a:r>
+              <a:t>予測確率</a:t>
             </a:r>
           </a:p>
         </p:txBody>
@@ -6103,16 +6015,8 @@
           <a:bodyPr rtlCol="0" anchor="ctr" wrap="square" bIns="36576"/>
           <a:lstStyle/>
           <a:p>
-            <a:pPr algn="ctr">
-              <a:defRPr sz="1300" b="1">
-                <a:solidFill>
-                  <a:srgbClr val="C77D20"/>
-                </a:solidFill>
-                <a:latin typeface="Yu Gothic"/>
-              </a:defRPr>
-            </a:pPr>
-            <a:r>
-              <a:t>正解</a:t>
+            <a:r>
+              <a:t>正解クラス</a:t>
             </a:r>
           </a:p>
         </p:txBody>
@@ -6158,16 +6062,8 @@
           <a:bodyPr rtlCol="0" anchor="ctr" wrap="square" bIns="36576"/>
           <a:lstStyle/>
           <a:p>
-            <a:pPr algn="ctr">
-              <a:defRPr sz="1300" b="1">
-                <a:solidFill>
-                  <a:srgbClr val="C77D20"/>
-                </a:solidFill>
-                <a:latin typeface="Yu Gothic"/>
-              </a:defRPr>
-            </a:pPr>
-            <a:r>
-              <a:t>ズレ</a:t>
+            <a:r>
+              <a:t>-log</a:t>
             </a:r>
           </a:p>
         </p:txBody>
@@ -6373,16 +6269,8 @@
           <a:bodyPr rtlCol="0" anchor="ctr" wrap="square" bIns="36576"/>
           <a:lstStyle/>
           <a:p>
-            <a:pPr algn="ctr">
-              <a:defRPr sz="1400" b="1">
-                <a:solidFill>
-                  <a:srgbClr val="276749"/>
-                </a:solidFill>
-                <a:latin typeface="Yu Gothic"/>
-              </a:defRPr>
-            </a:pPr>
-            <a:r>
-              <a:t>第2回の出力を予測として読む</a:t>
+            <a:r>
+              <a:t>第2回の出力を予測確率として読む</a:t>
             </a:r>
           </a:p>
         </p:txBody>
@@ -6463,16 +6351,8 @@
           <a:bodyPr rtlCol="0" anchor="ctr" wrap="square" bIns="36576"/>
           <a:lstStyle/>
           <a:p>
-            <a:pPr algn="ctr">
-              <a:defRPr sz="1400" b="1">
-                <a:solidFill>
-                  <a:srgbClr val="24324B"/>
-                </a:solidFill>
-                <a:latin typeface="Yu Gothic"/>
-              </a:defRPr>
-            </a:pPr>
-            <a:r>
-              <a:t>正解とのズレをLossにする</a:t>
+            <a:r>
+              <a:t>正解クラスの確率からLossを作る</a:t>
             </a:r>
           </a:p>
         </p:txBody>
@@ -6968,16 +6848,8 @@
           <a:bodyPr rtlCol="0" anchor="ctr" wrap="square" bIns="36576"/>
           <a:lstStyle/>
           <a:p>
-            <a:pPr algn="ctr">
-              <a:defRPr sz="1600" b="1">
-                <a:solidFill>
-                  <a:srgbClr val="24324B"/>
-                </a:solidFill>
-                <a:latin typeface="Yu Gothic"/>
-              </a:defRPr>
-            </a:pPr>
-            <a:r>
-              <a:t>小さくしているのは、式と表の対応を見失わないためです。</a:t>
+            <a:r>
+              <a:t>この回では小さな確率表で、Cross Entropyの読み方に絞ります。</a:t>
             </a:r>
           </a:p>
         </p:txBody>
@@ -7102,16 +6974,8 @@
           </a:bodyPr>
           <a:lstStyle/>
           <a:p>
-            <a:pPr algn="l">
-              <a:defRPr sz="2500" b="1">
-                <a:solidFill>
-                  <a:srgbClr val="24324B"/>
-                </a:solidFill>
-                <a:latin typeface="Yu Gothic"/>
-              </a:defRPr>
-            </a:pPr>
-            <a:r>
-              <a:t>式、Excel、Pythonの対応を押さえる</a:t>
+            <a:r>
+              <a:t>正解確率とLossの対応を押さえる</a:t>
             </a:r>
           </a:p>
         </p:txBody>
@@ -7157,20 +7021,12 @@
           <a:bodyPr rtlCol="0" anchor="ctr" wrap="square" bIns="36576"/>
           <a:lstStyle/>
           <a:p>
-            <a:pPr algn="ctr">
-              <a:defRPr sz="1900" b="1">
-                <a:solidFill>
-                  <a:srgbClr val="2F6690"/>
-                </a:solidFill>
-                <a:latin typeface="Yu Gothic"/>
-              </a:defRPr>
-            </a:pPr>
             <a:r>
               <a:t>1</a:t>
             </a:r>
             <a:br/>
             <a:r>
-              <a:t>予測</a:t>
+              <a:t>予測確率</a:t>
             </a:r>
           </a:p>
         </p:txBody>
@@ -7216,20 +7072,12 @@
           <a:bodyPr rtlCol="0" anchor="ctr" wrap="square" bIns="36576"/>
           <a:lstStyle/>
           <a:p>
-            <a:pPr algn="ctr">
-              <a:defRPr sz="1900" b="1">
-                <a:solidFill>
-                  <a:srgbClr val="C77D20"/>
-                </a:solidFill>
-                <a:latin typeface="Yu Gothic"/>
-              </a:defRPr>
-            </a:pPr>
             <a:r>
               <a:t>2</a:t>
             </a:r>
             <a:br/>
             <a:r>
-              <a:t>正解</a:t>
+              <a:t>正解クラス</a:t>
             </a:r>
           </a:p>
         </p:txBody>
@@ -7275,20 +7123,12 @@
           <a:bodyPr rtlCol="0" anchor="ctr" wrap="square" bIns="36576"/>
           <a:lstStyle/>
           <a:p>
-            <a:pPr algn="ctr">
-              <a:defRPr sz="1900" b="1">
-                <a:solidFill>
-                  <a:srgbClr val="276749"/>
-                </a:solidFill>
-                <a:latin typeface="Yu Gothic"/>
-              </a:defRPr>
-            </a:pPr>
             <a:r>
               <a:t>3</a:t>
             </a:r>
             <a:br/>
             <a:r>
-              <a:t>ズレ</a:t>
+              <a:t>Loss</a:t>
             </a:r>
           </a:p>
         </p:txBody>
@@ -7315,16 +7155,8 @@
           </a:bodyPr>
           <a:lstStyle/>
           <a:p>
-            <a:pPr algn="ctr">
-              <a:defRPr sz="1800" b="1">
-                <a:solidFill>
-                  <a:srgbClr val="24324B"/>
-                </a:solidFill>
-                <a:latin typeface="Yu Gothic"/>
-              </a:defRPr>
-            </a:pPr>
-            <a:r>
-              <a:t>予測と正解のズレがLossになる流れを見る</a:t>
+            <a:r>
+              <a:t>正解クラスの確率がLossになる流れを見る</a:t>
             </a:r>
           </a:p>
         </p:txBody>
@@ -7449,16 +7281,28 @@
           </a:bodyPr>
           <a:lstStyle/>
           <a:p>
-            <a:pPr algn="l">
-              <a:defRPr sz="2500" b="1">
-                <a:solidFill>
-                  <a:srgbClr val="24324B"/>
-                </a:solidFill>
-                <a:latin typeface="Yu Gothic"/>
-              </a:defRPr>
-            </a:pPr>
             <a:r>
               <a:t>この回の用語</a:t>
+            </a:r>
+          </a:p>
+          <a:p>
+            <a:r>
+              <a:t>Loss: 予測の外れ具合を表す値</a:t>
+            </a:r>
+          </a:p>
+          <a:p>
+            <a:r>
+              <a:t>Cross Entropy: 正解クラスの確率から作る分類のLoss</a:t>
+            </a:r>
+          </a:p>
+          <a:p>
+            <a:r>
+              <a:t>target_probability: 正解クラスに割り当てた確率</a:t>
+            </a:r>
+          </a:p>
+          <a:p>
+            <a:r>
+              <a:t>epsilon: log(0)を避けるための小さな値</a:t>
             </a:r>
           </a:p>
         </p:txBody>
@@ -8604,16 +8448,8 @@
           <a:bodyPr rtlCol="0" anchor="ctr" wrap="square" bIns="36576"/>
           <a:lstStyle/>
           <a:p>
-            <a:pPr algn="ctr">
-              <a:defRPr sz="1400" b="1">
-                <a:solidFill>
-                  <a:srgbClr val="24324B"/>
-                </a:solidFill>
-                <a:latin typeface="Yu Gothic"/>
-              </a:defRPr>
-            </a:pPr>
-            <a:r>
-              <a:t>ズレを1つの数値にして学習の目印にする</a:t>
+            <a:r>
+              <a:t>正解クラスの確率をLossに変える</a:t>
             </a:r>
           </a:p>
         </p:txBody>
@@ -8738,16 +8574,8 @@
           </a:bodyPr>
           <a:lstStyle/>
           <a:p>
-            <a:pPr algn="l">
-              <a:defRPr sz="2500" b="1">
-                <a:solidFill>
-                  <a:srgbClr val="24324B"/>
-                </a:solidFill>
-                <a:latin typeface="Yu Gothic"/>
-              </a:defRPr>
-            </a:pPr>
-            <a:r>
-              <a:t>予測と正解のズレがLossになる流れを見る</a:t>
+            <a:r>
+              <a:t>正解クラスの確率がLossになる流れを見る</a:t>
             </a:r>
           </a:p>
         </p:txBody>
@@ -8774,65 +8602,21 @@
           </a:bodyPr>
           <a:lstStyle/>
           <a:p>
-            <a:pPr>
-              <a:spcAft>
-                <a:spcPts val="800"/>
-              </a:spcAft>
-              <a:defRPr sz="1600">
-                <a:solidFill>
-                  <a:srgbClr val="24324B"/>
-                </a:solidFill>
-                <a:latin typeface="Yu Gothic"/>
-              </a:defRPr>
-            </a:pPr>
-            <a:r>
-              <a:t>• 予測と正解のズレがLossになる流れを見る</a:t>
-            </a:r>
-          </a:p>
-          <a:p>
-            <a:pPr>
-              <a:spcAft>
-                <a:spcPts val="800"/>
-              </a:spcAft>
-              <a:defRPr sz="1600">
-                <a:solidFill>
-                  <a:srgbClr val="24324B"/>
-                </a:solidFill>
-                <a:latin typeface="Yu Gothic"/>
-              </a:defRPr>
-            </a:pPr>
+            <a:r>
+              <a:t>• 正解クラスの確率がLossになる流れを見る</a:t>
+            </a:r>
+          </a:p>
+          <a:p>
             <a:r>
               <a:t>• Excel上の値や設定を変更する</a:t>
             </a:r>
           </a:p>
           <a:p>
-            <a:pPr>
-              <a:spcAft>
-                <a:spcPts val="800"/>
-              </a:spcAft>
-              <a:defRPr sz="1600">
-                <a:solidFill>
-                  <a:srgbClr val="24324B"/>
-                </a:solidFill>
-                <a:latin typeface="Yu Gothic"/>
-              </a:defRPr>
-            </a:pPr>
             <a:r>
               <a:t>• PythonがWorkbookから読み直して計算する</a:t>
             </a:r>
           </a:p>
           <a:p>
-            <a:pPr>
-              <a:spcAft>
-                <a:spcPts val="800"/>
-              </a:spcAft>
-              <a:defRPr sz="1600">
-                <a:solidFill>
-                  <a:srgbClr val="24324B"/>
-                </a:solidFill>
-                <a:latin typeface="Yu Gothic"/>
-              </a:defRPr>
-            </a:pPr>
             <a:r>
               <a:t>• 返却表の列を見て変化を確認する</a:t>
             </a:r>
@@ -8880,21 +8664,13 @@
           <a:bodyPr rtlCol="0" anchor="ctr" wrap="square" bIns="36576"/>
           <a:lstStyle/>
           <a:p>
-            <a:pPr algn="ctr">
-              <a:defRPr sz="1100" b="1">
-                <a:solidFill>
-                  <a:srgbClr val="2F6690"/>
-                </a:solidFill>
-                <a:latin typeface="Yu Gothic"/>
-              </a:defRPr>
-            </a:pPr>
             <a:r>
               <a:t>損失関数とは</a:t>
             </a:r>
             <a:br/>
             <a:br/>
             <a:r>
-              <a:t>損失関数とは、予測が正解からどれだけ外れているかを1つの数値にし、学習で小さくしたい目標を表す関数です。</a:t>
+              <a:t>損失関数とは、予測が正解からどれだけ外れているかを数値にし、学習で小さくしたい目標を表す関数です。分類では、正解クラスに割り当てた確率からLossを作ります。</a:t>
             </a:r>
           </a:p>
         </p:txBody>
@@ -8940,25 +8716,17 @@
           <a:bodyPr rtlCol="0" anchor="ctr" wrap="square" bIns="36576"/>
           <a:lstStyle/>
           <a:p>
-            <a:pPr algn="ctr">
-              <a:defRPr sz="1500" b="1">
-                <a:solidFill>
-                  <a:srgbClr val="276749"/>
-                </a:solidFill>
-                <a:latin typeface="Yu Gothic"/>
-              </a:defRPr>
-            </a:pPr>
             <a:r>
               <a:t>見える変化</a:t>
             </a:r>
             <a:br/>
             <a:br/>
             <a:r>
-              <a:t>prediction / target</a:t>
+              <a:t>target_probability</a:t>
             </a:r>
             <a:br/>
             <a:r>
-              <a:t>loss</a:t>
+              <a:t>cross_entropy</a:t>
             </a:r>
           </a:p>
         </p:txBody>
@@ -9004,16 +8772,8 @@
           <a:bodyPr rtlCol="0" anchor="ctr" wrap="square" bIns="36576"/>
           <a:lstStyle/>
           <a:p>
-            <a:pPr algn="ctr">
-              <a:defRPr sz="1100" b="1">
-                <a:solidFill>
-                  <a:srgbClr val="2F6690"/>
-                </a:solidFill>
-                <a:latin typeface="Yu Gothic"/>
-              </a:defRPr>
-            </a:pPr>
-            <a:r>
-              <a:t>予測</a:t>
+            <a:r>
+              <a:t>予測確率</a:t>
             </a:r>
           </a:p>
         </p:txBody>
@@ -9059,16 +8819,8 @@
           <a:bodyPr rtlCol="0" anchor="ctr" wrap="square" bIns="36576"/>
           <a:lstStyle/>
           <a:p>
-            <a:pPr algn="ctr">
-              <a:defRPr sz="1100" b="1">
-                <a:solidFill>
-                  <a:srgbClr val="C77D20"/>
-                </a:solidFill>
-                <a:latin typeface="Yu Gothic"/>
-              </a:defRPr>
-            </a:pPr>
-            <a:r>
-              <a:t>正解</a:t>
+            <a:r>
+              <a:t>正解クラス</a:t>
             </a:r>
           </a:p>
         </p:txBody>
@@ -9114,16 +8866,8 @@
           <a:bodyPr rtlCol="0" anchor="ctr" wrap="square" bIns="36576"/>
           <a:lstStyle/>
           <a:p>
-            <a:pPr algn="ctr">
-              <a:defRPr sz="1100" b="1">
-                <a:solidFill>
-                  <a:srgbClr val="C77D20"/>
-                </a:solidFill>
-                <a:latin typeface="Yu Gothic"/>
-              </a:defRPr>
-            </a:pPr>
-            <a:r>
-              <a:t>ズレ</a:t>
+            <a:r>
+              <a:t>-log</a:t>
             </a:r>
           </a:p>
         </p:txBody>
@@ -9408,16 +9152,8 @@
           </a:bodyPr>
           <a:lstStyle/>
           <a:p>
-            <a:pPr algn="l">
-              <a:defRPr sz="2500" b="1">
-                <a:solidFill>
-                  <a:srgbClr val="24324B"/>
-                </a:solidFill>
-                <a:latin typeface="Yu Gothic"/>
-              </a:defRPr>
-            </a:pPr>
-            <a:r>
-              <a:t>損失関数の計算を図で見る</a:t>
+            <a:r>
+              <a:t>Cross Entropyの計算を図で見る</a:t>
             </a:r>
           </a:p>
         </p:txBody>
@@ -9571,16 +9307,8 @@
           <a:bodyPr rtlCol="0" anchor="ctr" wrap="square" bIns="36576"/>
           <a:lstStyle/>
           <a:p>
-            <a:pPr algn="ctr">
-              <a:defRPr sz="1300" b="1">
-                <a:solidFill>
-                  <a:srgbClr val="2F6690"/>
-                </a:solidFill>
-                <a:latin typeface="Yu Gothic"/>
-              </a:defRPr>
-            </a:pPr>
-            <a:r>
-              <a:t>予測</a:t>
+            <a:r>
+              <a:t>予測確率</a:t>
             </a:r>
           </a:p>
         </p:txBody>
@@ -9626,16 +9354,8 @@
           <a:bodyPr rtlCol="0" anchor="ctr" wrap="square" bIns="36576"/>
           <a:lstStyle/>
           <a:p>
-            <a:pPr algn="ctr">
-              <a:defRPr sz="1300" b="1">
-                <a:solidFill>
-                  <a:srgbClr val="C77D20"/>
-                </a:solidFill>
-                <a:latin typeface="Yu Gothic"/>
-              </a:defRPr>
-            </a:pPr>
-            <a:r>
-              <a:t>正解</a:t>
+            <a:r>
+              <a:t>正解クラス</a:t>
             </a:r>
           </a:p>
         </p:txBody>
@@ -9681,16 +9401,8 @@
           <a:bodyPr rtlCol="0" anchor="ctr" wrap="square" bIns="36576"/>
           <a:lstStyle/>
           <a:p>
-            <a:pPr algn="ctr">
-              <a:defRPr sz="1300" b="1">
-                <a:solidFill>
-                  <a:srgbClr val="C77D20"/>
-                </a:solidFill>
-                <a:latin typeface="Yu Gothic"/>
-              </a:defRPr>
-            </a:pPr>
-            <a:r>
-              <a:t>ズレ</a:t>
+            <a:r>
+              <a:t>-log</a:t>
             </a:r>
           </a:p>
         </p:txBody>
@@ -10316,16 +10028,8 @@
           <a:bodyPr rtlCol="0" anchor="ctr" wrap="square" bIns="36576"/>
           <a:lstStyle/>
           <a:p>
-            <a:pPr algn="ctr">
-              <a:defRPr sz="1500" b="1">
-                <a:solidFill>
-                  <a:srgbClr val="276749"/>
-                </a:solidFill>
-                <a:latin typeface="Yu Gothic"/>
-              </a:defRPr>
-            </a:pPr>
-            <a:r>
-              <a:t>ズレを1つの数値にして学習の目印にする</a:t>
+            <a:r>
+              <a:t>正解クラスの確率をLossに変える</a:t>
             </a:r>
           </a:p>
         </p:txBody>
@@ -10371,16 +10075,8 @@
           <a:bodyPr rtlCol="0" anchor="ctr" wrap="square" bIns="36576"/>
           <a:lstStyle/>
           <a:p>
-            <a:pPr algn="ctr">
-              <a:defRPr sz="1400" b="1">
-                <a:solidFill>
-                  <a:srgbClr val="276749"/>
-                </a:solidFill>
-                <a:latin typeface="Yu Gothic"/>
-              </a:defRPr>
-            </a:pPr>
-            <a:r>
-              <a:t>ズレを1つの数値にして学習の目印にする</a:t>
+            <a:r>
+              <a:t>正解クラスの確率をLossに変える</a:t>
             </a:r>
           </a:p>
         </p:txBody>
@@ -11105,16 +10801,8 @@
           </a:bodyPr>
           <a:lstStyle/>
           <a:p>
-            <a:pPr algn="l">
-              <a:defRPr sz="2500" b="1">
-                <a:solidFill>
-                  <a:srgbClr val="24324B"/>
-                </a:solidFill>
-                <a:latin typeface="Yu Gothic"/>
-              </a:defRPr>
-            </a:pPr>
-            <a:r>
-              <a:t>01_INPUT がPythonに渡す値の入口</a:t>
+            <a:r>
+              <a:t>01_INPUT が予測確率と正解クラスを渡す</a:t>
             </a:r>
           </a:p>
         </p:txBody>
@@ -11409,14 +11097,6 @@
           <a:bodyPr rtlCol="0" anchor="ctr" wrap="square" bIns="36576"/>
           <a:lstStyle/>
           <a:p>
-            <a:pPr algn="ctr">
-              <a:defRPr sz="2000" b="1">
-                <a:solidFill>
-                  <a:srgbClr val="276749"/>
-                </a:solidFill>
-                <a:latin typeface="Yu Gothic"/>
-              </a:defRPr>
-            </a:pPr>
             <a:r>
               <a:t>Pythonは</a:t>
             </a:r>
@@ -11426,7 +11106,7 @@
             </a:r>
             <a:br/>
             <a:r>
-              <a:t>でこの範囲を読む</a:t>
+              <a:t>で表を読み直す</a:t>
             </a:r>
           </a:p>
         </p:txBody>
@@ -11472,16 +11152,8 @@
           <a:bodyPr rtlCol="0" anchor="ctr" wrap="square" bIns="36576"/>
           <a:lstStyle/>
           <a:p>
-            <a:pPr algn="ctr">
-              <a:defRPr sz="1500" b="1">
-                <a:solidFill>
-                  <a:srgbClr val="24324B"/>
-                </a:solidFill>
-                <a:latin typeface="Yu Gothic"/>
-              </a:defRPr>
-            </a:pPr>
-            <a:r>
-              <a:t>Excelで変更した値が、そのままPythonの計算結果に反映されます。</a:t>
+            <a:r>
+              <a:t>Excelで確率や正解クラスを変えると、Cross Entropyの値が変わります。</a:t>
             </a:r>
           </a:p>
         </p:txBody>
@@ -11606,16 +11278,8 @@
           </a:bodyPr>
           <a:lstStyle/>
           <a:p>
-            <a:pPr algn="l">
-              <a:defRPr sz="2500" b="1">
-                <a:solidFill>
-                  <a:srgbClr val="24324B"/>
-                </a:solidFill>
-                <a:latin typeface="Yu Gothic"/>
-              </a:defRPr>
-            </a:pPr>
-            <a:r>
-              <a:t>どこを変えると、どの表が変わるか</a:t>
+            <a:r>
+              <a:t>どこを変えると、どのLossが変わるか</a:t>
             </a:r>
           </a:p>
         </p:txBody>
@@ -11910,16 +11574,8 @@
           <a:bodyPr rtlCol="0" anchor="ctr" wrap="square" bIns="36576"/>
           <a:lstStyle/>
           <a:p>
-            <a:pPr algn="ctr">
-              <a:defRPr sz="1500" b="1">
-                <a:solidFill>
-                  <a:srgbClr val="276749"/>
-                </a:solidFill>
-                <a:latin typeface="Yu Gothic"/>
-              </a:defRPr>
-            </a:pPr>
-            <a:r>
-              <a:t>操作の目的は、値を変えた時の表の変化を読むことです。</a:t>
+            <a:r>
+              <a:t>正解クラスに対応する確率を変えた時、Lossがどう動くかを読みます。</a:t>
             </a:r>
           </a:p>
         </p:txBody>
@@ -12745,16 +12401,8 @@
           </a:bodyPr>
           <a:lstStyle/>
           <a:p>
-            <a:pPr algn="l">
-              <a:defRPr sz="2500" b="1">
-                <a:solidFill>
-                  <a:srgbClr val="24324B"/>
-                </a:solidFill>
-                <a:latin typeface="Yu Gothic"/>
-              </a:defRPr>
-            </a:pPr>
-            <a:r>
-              <a:t>初期値の結果を表で読む</a:t>
+            <a:r>
+              <a:t>class_ce の結果を表で読む</a:t>
             </a:r>
           </a:p>
         </p:txBody>
@@ -13220,20 +12868,12 @@
           <a:bodyPr rtlCol="0" anchor="ctr" wrap="square" bIns="36576"/>
           <a:lstStyle/>
           <a:p>
-            <a:pPr algn="ctr">
-              <a:defRPr sz="1800" b="1">
-                <a:solidFill>
-                  <a:srgbClr val="276749"/>
-                </a:solidFill>
-                <a:latin typeface="Yu Gothic"/>
-              </a:defRPr>
-            </a:pPr>
-            <a:r>
-              <a:t>初期値の</a:t>
+            <a:r>
+              <a:t>正解確率と</a:t>
             </a:r>
             <a:br/>
             <a:r>
-              <a:t>結果を読む</a:t>
+              <a:t>Lossを読む</a:t>
             </a:r>
           </a:p>
         </p:txBody>
@@ -13279,16 +12919,8 @@
           <a:bodyPr rtlCol="0" anchor="ctr" wrap="square" bIns="36576"/>
           <a:lstStyle/>
           <a:p>
-            <a:pPr algn="ctr">
-              <a:defRPr sz="1300" b="1">
-                <a:solidFill>
-                  <a:srgbClr val="2F6690"/>
-                </a:solidFill>
-                <a:latin typeface="Yu Gothic"/>
-              </a:defRPr>
-            </a:pPr>
-            <a:r>
-              <a:t>予測</a:t>
+            <a:r>
+              <a:t>予測確率</a:t>
             </a:r>
           </a:p>
         </p:txBody>
@@ -13334,16 +12966,8 @@
           <a:bodyPr rtlCol="0" anchor="ctr" wrap="square" bIns="36576"/>
           <a:lstStyle/>
           <a:p>
-            <a:pPr algn="ctr">
-              <a:defRPr sz="1300" b="1">
-                <a:solidFill>
-                  <a:srgbClr val="C77D20"/>
-                </a:solidFill>
-                <a:latin typeface="Yu Gothic"/>
-              </a:defRPr>
-            </a:pPr>
-            <a:r>
-              <a:t>正解</a:t>
+            <a:r>
+              <a:t>正解クラス</a:t>
             </a:r>
           </a:p>
         </p:txBody>
@@ -13389,16 +13013,8 @@
           <a:bodyPr rtlCol="0" anchor="ctr" wrap="square" bIns="36576"/>
           <a:lstStyle/>
           <a:p>
-            <a:pPr algn="ctr">
-              <a:defRPr sz="1300" b="1">
-                <a:solidFill>
-                  <a:srgbClr val="C77D20"/>
-                </a:solidFill>
-                <a:latin typeface="Yu Gothic"/>
-              </a:defRPr>
-            </a:pPr>
-            <a:r>
-              <a:t>ズレ</a:t>
+            <a:r>
+              <a:t>-log</a:t>
             </a:r>
           </a:p>
         </p:txBody>
